--- a/tests/testresults/script_IQSlidedeck.pptx
+++ b/tests/testresults/script_IQSlidedeck.pptx
@@ -5960,7 +5960,7 @@
               <a:rPr/>
               <a:t>Cars and the time they take to stop (non-QCed)
 Daniel Kaschek, IntiQuan
-2026-06-09</a:t>
+2026-06-25</a:t>
             </a:r>
           </a:p>
         </p:txBody>
@@ -6098,7 +6098,7 @@
           <a:p>
             <a:r>
               <a:rPr/>
-              <a:t>script_IQSlidedeck.R | Date: 2026-06-09 09:47:06.949497</a:t>
+              <a:t>script_IQSlidedeck.R | Date: 2026-06-25 13:42:34.215137</a:t>
             </a:r>
           </a:p>
         </p:txBody>
@@ -6466,7 +6466,7 @@
           <a:p>
             <a:r>
               <a:rPr/>
-              <a:t>script_IQSlidedeck.R | Date: 2026-06-09 09:47:07.894159</a:t>
+              <a:t>script_IQSlidedeck.R | Date: 2026-06-25 13:42:35.869257</a:t>
             </a:r>
           </a:p>
         </p:txBody>
@@ -6834,7 +6834,7 @@
           <a:p>
             <a:r>
               <a:rPr/>
-              <a:t>script_IQSlidedeck.R | Date: 2026-06-09 09:47:09.029357</a:t>
+              <a:t>script_IQSlidedeck.R | Date: 2026-06-25 13:42:37.091803</a:t>
             </a:r>
           </a:p>
         </p:txBody>
@@ -7024,7 +7024,7 @@
           <a:p>
             <a:r>
               <a:rPr/>
-              <a:t>script_IQSlidedeck.R | Date: 2026-06-09 09:47:17.913721</a:t>
+              <a:t>script_IQSlidedeck.R | Date: 2026-06-25 13:42:47.747289</a:t>
             </a:r>
           </a:p>
         </p:txBody>
@@ -7155,7 +7155,7 @@
           <a:p>
             <a:r>
               <a:rPr/>
-              <a:t>script_IQSlidedeck.R | Date: 2026-06-09 09:47:17.981216</a:t>
+              <a:t>script_IQSlidedeck.R | Date: 2026-06-25 13:42:47.800125</a:t>
             </a:r>
           </a:p>
         </p:txBody>
@@ -7315,7 +7315,7 @@
           <a:p>
             <a:r>
               <a:rPr/>
-              <a:t>script_IQSlidedeck.R | Date: 2026-06-09 09:47:18.055995</a:t>
+              <a:t>script_IQSlidedeck.R | Date: 2026-06-25 13:42:47.859144</a:t>
             </a:r>
           </a:p>
         </p:txBody>
@@ -7453,7 +7453,7 @@
           <a:p>
             <a:r>
               <a:rPr/>
-              <a:t>script_IQSlidedeck.R | Date: 2026-06-09 09:47:18.126241</a:t>
+              <a:t>script_IQSlidedeck.R | Date: 2026-06-25 13:42:47.917594</a:t>
             </a:r>
           </a:p>
         </p:txBody>
@@ -7617,7 +7617,7 @@
           <a:p>
             <a:r>
               <a:rPr/>
-              <a:t>script_IQSlidedeck.R | Date: 2026-06-09 09:47:06.003796</a:t>
+              <a:t>script_IQSlidedeck.R | Date: 2026-06-25 13:42:33.134877</a:t>
             </a:r>
           </a:p>
         </p:txBody>
@@ -7834,7 +7834,7 @@
           <a:p>
             <a:r>
               <a:rPr/>
-              <a:t>script_IQSlidedeck.R | Date: 2026-06-09 09:47:06.191096</a:t>
+              <a:t>script_IQSlidedeck.R | Date: 2026-06-25 13:42:33.318072</a:t>
             </a:r>
           </a:p>
         </p:txBody>
@@ -7939,7 +7939,7 @@
           <a:p>
             <a:r>
               <a:rPr/>
-              <a:t>script_IQSlidedeck.R | Date: 2026-06-09 09:47:10.047847</a:t>
+              <a:t>script_IQSlidedeck.R | Date: 2026-06-25 13:42:38.134802</a:t>
             </a:r>
           </a:p>
         </p:txBody>
@@ -8044,7 +8044,7 @@
           <a:p>
             <a:r>
               <a:rPr/>
-              <a:t>script_IQSlidedeck.R | Date: 2026-06-09 09:47:11.742142</a:t>
+              <a:t>script_IQSlidedeck.R | Date: 2026-06-25 13:42:39.88711</a:t>
             </a:r>
           </a:p>
         </p:txBody>
@@ -8149,7 +8149,7 @@
           <a:p>
             <a:r>
               <a:rPr/>
-              <a:t>script_IQSlidedeck.R | Date: 2026-06-09 09:47:16.873372</a:t>
+              <a:t>script_IQSlidedeck.R | Date: 2026-06-25 13:42:46.922015</a:t>
             </a:r>
           </a:p>
         </p:txBody>
